--- a/public/fun/pack/pptx/family/가족소개_03_3대가족_교정벚나무.pptx
+++ b/public/fun/pack/pptx/family/가족소개_03_3대가족_교정벚나무.pptx
@@ -3347,7 +3347,7 @@
             <a:r>
               <a:rPr sz="3600" b="1" i="0">
                 <a:solidFill>
-                  <a:srgbClr val="9E2E4A"/>
+                  <a:srgbClr val="721D32"/>
                 </a:solidFill>
               </a:rPr>
               <a:t>우리 가족을 소개합니다</a:t>
@@ -3385,7 +3385,7 @@
             <a:r>
               <a:rPr sz="1700" b="0" i="1">
                 <a:solidFill>
-                  <a:srgbClr val="9E2E4A"/>
+                  <a:srgbClr val="721D32"/>
                 </a:solidFill>
               </a:rPr>
               <a:t>할머니가 졸업한 학교 벚나무 앞에서</a:t>
@@ -3445,7 +3445,7 @@
     <p:bg>
       <p:bgPr>
         <a:solidFill>
-          <a:srgbClr val="D1617D"/>
+          <a:srgbClr val="DB3D65"/>
         </a:solidFill>
         <a:effectLst/>
       </p:bgPr>
@@ -3518,7 +3518,7 @@
             <a:r>
               <a:rPr sz="3000" b="1" i="0">
                 <a:solidFill>
-                  <a:srgbClr val="9E2E4A"/>
+                  <a:srgbClr val="721D32"/>
                 </a:solidFill>
               </a:rPr>
               <a:t>가족 구성원</a:t>
@@ -3541,11 +3541,11 @@
             <a:avLst/>
           </a:prstGeom>
           <a:solidFill>
-            <a:srgbClr val="F3CED7"/>
+            <a:srgbClr val="F7D4DD"/>
           </a:solidFill>
           <a:ln w="19050">
             <a:solidFill>
-              <a:srgbClr val="D1617D"/>
+              <a:srgbClr val="DB3D65"/>
             </a:solidFill>
             <a:prstDash val="dash"/>
           </a:ln>
@@ -3564,7 +3564,7 @@
             <a:r>
               <a:rPr sz="1200" b="0" i="0">
                 <a:solidFill>
-                  <a:srgbClr val="9E2E4A"/>
+                  <a:srgbClr val="721D32"/>
                 </a:solidFill>
               </a:rPr>
               <a:t>사진</a:t>
@@ -3602,7 +3602,7 @@
             <a:r>
               <a:rPr sz="1600" b="1" i="0">
                 <a:solidFill>
-                  <a:srgbClr val="9E2E4A"/>
+                  <a:srgbClr val="721D32"/>
                 </a:solidFill>
               </a:rPr>
               <a:t>할아버지</a:t>
@@ -3693,11 +3693,11 @@
             <a:avLst/>
           </a:prstGeom>
           <a:solidFill>
-            <a:srgbClr val="F3CED7"/>
+            <a:srgbClr val="F7D4DD"/>
           </a:solidFill>
           <a:ln w="19050">
             <a:solidFill>
-              <a:srgbClr val="D1617D"/>
+              <a:srgbClr val="DB3D65"/>
             </a:solidFill>
             <a:prstDash val="dash"/>
           </a:ln>
@@ -3716,7 +3716,7 @@
             <a:r>
               <a:rPr sz="1200" b="0" i="0">
                 <a:solidFill>
-                  <a:srgbClr val="9E2E4A"/>
+                  <a:srgbClr val="721D32"/>
                 </a:solidFill>
               </a:rPr>
               <a:t>사진</a:t>
@@ -3754,7 +3754,7 @@
             <a:r>
               <a:rPr sz="1600" b="1" i="0">
                 <a:solidFill>
-                  <a:srgbClr val="9E2E4A"/>
+                  <a:srgbClr val="721D32"/>
                 </a:solidFill>
               </a:rPr>
               <a:t>할머니</a:t>
@@ -3845,11 +3845,11 @@
             <a:avLst/>
           </a:prstGeom>
           <a:solidFill>
-            <a:srgbClr val="F3CED7"/>
+            <a:srgbClr val="F7D4DD"/>
           </a:solidFill>
           <a:ln w="19050">
             <a:solidFill>
-              <a:srgbClr val="D1617D"/>
+              <a:srgbClr val="DB3D65"/>
             </a:solidFill>
             <a:prstDash val="dash"/>
           </a:ln>
@@ -3868,7 +3868,7 @@
             <a:r>
               <a:rPr sz="1200" b="0" i="0">
                 <a:solidFill>
-                  <a:srgbClr val="9E2E4A"/>
+                  <a:srgbClr val="721D32"/>
                 </a:solidFill>
               </a:rPr>
               <a:t>사진</a:t>
@@ -3906,7 +3906,7 @@
             <a:r>
               <a:rPr sz="1600" b="1" i="0">
                 <a:solidFill>
-                  <a:srgbClr val="9E2E4A"/>
+                  <a:srgbClr val="721D32"/>
                 </a:solidFill>
               </a:rPr>
               <a:t>아빠</a:t>
@@ -3997,11 +3997,11 @@
             <a:avLst/>
           </a:prstGeom>
           <a:solidFill>
-            <a:srgbClr val="F3CED7"/>
+            <a:srgbClr val="F7D4DD"/>
           </a:solidFill>
           <a:ln w="19050">
             <a:solidFill>
-              <a:srgbClr val="D1617D"/>
+              <a:srgbClr val="DB3D65"/>
             </a:solidFill>
             <a:prstDash val="dash"/>
           </a:ln>
@@ -4020,7 +4020,7 @@
             <a:r>
               <a:rPr sz="1200" b="0" i="0">
                 <a:solidFill>
-                  <a:srgbClr val="9E2E4A"/>
+                  <a:srgbClr val="721D32"/>
                 </a:solidFill>
               </a:rPr>
               <a:t>사진</a:t>
@@ -4058,7 +4058,7 @@
             <a:r>
               <a:rPr sz="1600" b="1" i="0">
                 <a:solidFill>
-                  <a:srgbClr val="9E2E4A"/>
+                  <a:srgbClr val="721D32"/>
                 </a:solidFill>
               </a:rPr>
               <a:t>엄마</a:t>
@@ -4149,11 +4149,11 @@
             <a:avLst/>
           </a:prstGeom>
           <a:solidFill>
-            <a:srgbClr val="F3CED7"/>
+            <a:srgbClr val="F7D4DD"/>
           </a:solidFill>
           <a:ln w="19050">
             <a:solidFill>
-              <a:srgbClr val="D1617D"/>
+              <a:srgbClr val="DB3D65"/>
             </a:solidFill>
             <a:prstDash val="dash"/>
           </a:ln>
@@ -4172,7 +4172,7 @@
             <a:r>
               <a:rPr sz="1200" b="0" i="0">
                 <a:solidFill>
-                  <a:srgbClr val="9E2E4A"/>
+                  <a:srgbClr val="721D32"/>
                 </a:solidFill>
               </a:rPr>
               <a:t>사진</a:t>
@@ -4210,7 +4210,7 @@
             <a:r>
               <a:rPr sz="1600" b="1" i="0">
                 <a:solidFill>
-                  <a:srgbClr val="9E2E4A"/>
+                  <a:srgbClr val="721D32"/>
                 </a:solidFill>
               </a:rPr>
               <a:t>큰아이</a:t>
@@ -4301,11 +4301,11 @@
             <a:avLst/>
           </a:prstGeom>
           <a:solidFill>
-            <a:srgbClr val="F3CED7"/>
+            <a:srgbClr val="F7D4DD"/>
           </a:solidFill>
           <a:ln w="19050">
             <a:solidFill>
-              <a:srgbClr val="D1617D"/>
+              <a:srgbClr val="DB3D65"/>
             </a:solidFill>
             <a:prstDash val="dash"/>
           </a:ln>
@@ -4324,7 +4324,7 @@
             <a:r>
               <a:rPr sz="1200" b="0" i="0">
                 <a:solidFill>
-                  <a:srgbClr val="9E2E4A"/>
+                  <a:srgbClr val="721D32"/>
                 </a:solidFill>
               </a:rPr>
               <a:t>사진</a:t>
@@ -4362,7 +4362,7 @@
             <a:r>
               <a:rPr sz="1600" b="1" i="0">
                 <a:solidFill>
-                  <a:srgbClr val="9E2E4A"/>
+                  <a:srgbClr val="721D32"/>
                 </a:solidFill>
               </a:rPr>
               <a:t>작은아이</a:t>
@@ -4452,7 +4452,7 @@
     <p:bg>
       <p:bgPr>
         <a:solidFill>
-          <a:srgbClr val="D1617D"/>
+          <a:srgbClr val="DB3D65"/>
         </a:solidFill>
         <a:effectLst/>
       </p:bgPr>
@@ -4525,7 +4525,7 @@
             <a:r>
               <a:rPr sz="3000" b="1" i="0">
                 <a:solidFill>
-                  <a:srgbClr val="9E2E4A"/>
+                  <a:srgbClr val="721D32"/>
                 </a:solidFill>
               </a:rPr>
               <a:t>우리 가족 이야기</a:t>
@@ -4548,7 +4548,7 @@
             <a:avLst/>
           </a:prstGeom>
           <a:solidFill>
-            <a:srgbClr val="F3CED7"/>
+            <a:srgbClr val="F7D4DD"/>
           </a:solidFill>
           <a:ln>
             <a:noFill/>
@@ -4577,7 +4577,7 @@
             <a:avLst/>
           </a:prstGeom>
           <a:solidFill>
-            <a:srgbClr val="D1617D"/>
+            <a:srgbClr val="DB3D65"/>
           </a:solidFill>
           <a:ln w="38100">
             <a:solidFill>
@@ -4623,7 +4623,7 @@
             <a:r>
               <a:rPr sz="1600" b="1" i="0">
                 <a:solidFill>
-                  <a:srgbClr val="D1617D"/>
+                  <a:srgbClr val="DB3D65"/>
                 </a:solidFill>
               </a:rPr>
               <a:t>할아버지 할머니의 이야기</a:t>
@@ -4661,7 +4661,7 @@
             <a:r>
               <a:rPr sz="1800" b="1" i="0">
                 <a:solidFill>
-                  <a:srgbClr val="9E2E4A"/>
+                  <a:srgbClr val="721D32"/>
                 </a:solidFill>
               </a:rPr>
               <a:t>뿌리</a:t>
@@ -4722,7 +4722,7 @@
             <a:avLst/>
           </a:prstGeom>
           <a:solidFill>
-            <a:srgbClr val="D1617D"/>
+            <a:srgbClr val="DB3D65"/>
           </a:solidFill>
           <a:ln w="38100">
             <a:solidFill>
@@ -4768,7 +4768,7 @@
             <a:r>
               <a:rPr sz="1600" b="1" i="0">
                 <a:solidFill>
-                  <a:srgbClr val="D1617D"/>
+                  <a:srgbClr val="DB3D65"/>
                 </a:solidFill>
               </a:rPr>
               <a:t>부모가 된 날</a:t>
@@ -4806,7 +4806,7 @@
             <a:r>
               <a:rPr sz="1800" b="1" i="0">
                 <a:solidFill>
-                  <a:srgbClr val="9E2E4A"/>
+                  <a:srgbClr val="721D32"/>
                 </a:solidFill>
               </a:rPr>
               <a:t>새로운 가지</a:t>
@@ -4867,7 +4867,7 @@
             <a:avLst/>
           </a:prstGeom>
           <a:solidFill>
-            <a:srgbClr val="D1617D"/>
+            <a:srgbClr val="DB3D65"/>
           </a:solidFill>
           <a:ln w="38100">
             <a:solidFill>
@@ -4913,7 +4913,7 @@
             <a:r>
               <a:rPr sz="1600" b="1" i="0">
                 <a:solidFill>
-                  <a:srgbClr val="D1617D"/>
+                  <a:srgbClr val="DB3D65"/>
                 </a:solidFill>
               </a:rPr>
               <a:t>온 가족 모임</a:t>
@@ -4951,7 +4951,7 @@
             <a:r>
               <a:rPr sz="1800" b="1" i="0">
                 <a:solidFill>
-                  <a:srgbClr val="9E2E4A"/>
+                  <a:srgbClr val="721D32"/>
                 </a:solidFill>
               </a:rPr>
               <a:t>한자리에 모인 날</a:t>
@@ -5012,7 +5012,7 @@
             <a:avLst/>
           </a:prstGeom>
           <a:solidFill>
-            <a:srgbClr val="D1617D"/>
+            <a:srgbClr val="DB3D65"/>
           </a:solidFill>
           <a:ln w="38100">
             <a:solidFill>
@@ -5058,7 +5058,7 @@
             <a:r>
               <a:rPr sz="1600" b="1" i="0">
                 <a:solidFill>
-                  <a:srgbClr val="D1617D"/>
+                  <a:srgbClr val="DB3D65"/>
                 </a:solidFill>
               </a:rPr>
               <a:t>지금</a:t>
@@ -5096,7 +5096,7 @@
             <a:r>
               <a:rPr sz="1800" b="1" i="0">
                 <a:solidFill>
-                  <a:srgbClr val="9E2E4A"/>
+                  <a:srgbClr val="721D32"/>
                 </a:solidFill>
               </a:rPr>
               <a:t>오늘의 우리</a:t>
@@ -5156,7 +5156,7 @@
     <p:bg>
       <p:bgPr>
         <a:solidFill>
-          <a:srgbClr val="D1617D"/>
+          <a:srgbClr val="DB3D65"/>
         </a:solidFill>
         <a:effectLst/>
       </p:bgPr>
@@ -5229,7 +5229,7 @@
             <a:r>
               <a:rPr sz="3000" b="1" i="0">
                 <a:solidFill>
-                  <a:srgbClr val="9E2E4A"/>
+                  <a:srgbClr val="721D32"/>
                 </a:solidFill>
               </a:rPr>
               <a:t>우리 가족의 약속</a:t>
@@ -5254,11 +5254,11 @@
             </a:avLst>
           </a:prstGeom>
           <a:solidFill>
-            <a:srgbClr val="FAEFF2"/>
+            <a:srgbClr val="FCF3F5"/>
           </a:solidFill>
           <a:ln w="12700">
             <a:solidFill>
-              <a:srgbClr val="F3CED7"/>
+              <a:srgbClr val="F7D4DD"/>
             </a:solidFill>
           </a:ln>
         </p:spPr>
@@ -5285,7 +5285,7 @@
             <a:avLst/>
           </a:prstGeom>
           <a:solidFill>
-            <a:srgbClr val="D1617D"/>
+            <a:srgbClr val="DB3D65"/>
           </a:solidFill>
           <a:ln>
             <a:noFill/>
@@ -5343,7 +5343,7 @@
             <a:r>
               <a:rPr sz="1800" b="1" i="0">
                 <a:solidFill>
-                  <a:srgbClr val="9E2E4A"/>
+                  <a:srgbClr val="721D32"/>
                 </a:solidFill>
               </a:rPr>
               <a:t>약속 1</a:t>
@@ -5406,11 +5406,11 @@
             </a:avLst>
           </a:prstGeom>
           <a:solidFill>
-            <a:srgbClr val="FAEFF2"/>
+            <a:srgbClr val="FCF3F5"/>
           </a:solidFill>
           <a:ln w="12700">
             <a:solidFill>
-              <a:srgbClr val="F3CED7"/>
+              <a:srgbClr val="F7D4DD"/>
             </a:solidFill>
           </a:ln>
         </p:spPr>
@@ -5437,7 +5437,7 @@
             <a:avLst/>
           </a:prstGeom>
           <a:solidFill>
-            <a:srgbClr val="D1617D"/>
+            <a:srgbClr val="DB3D65"/>
           </a:solidFill>
           <a:ln>
             <a:noFill/>
@@ -5495,7 +5495,7 @@
             <a:r>
               <a:rPr sz="1800" b="1" i="0">
                 <a:solidFill>
-                  <a:srgbClr val="9E2E4A"/>
+                  <a:srgbClr val="721D32"/>
                 </a:solidFill>
               </a:rPr>
               <a:t>약속 2</a:t>
@@ -5558,11 +5558,11 @@
             </a:avLst>
           </a:prstGeom>
           <a:solidFill>
-            <a:srgbClr val="FAEFF2"/>
+            <a:srgbClr val="FCF3F5"/>
           </a:solidFill>
           <a:ln w="12700">
             <a:solidFill>
-              <a:srgbClr val="F3CED7"/>
+              <a:srgbClr val="F7D4DD"/>
             </a:solidFill>
           </a:ln>
         </p:spPr>
@@ -5589,7 +5589,7 @@
             <a:avLst/>
           </a:prstGeom>
           <a:solidFill>
-            <a:srgbClr val="D1617D"/>
+            <a:srgbClr val="DB3D65"/>
           </a:solidFill>
           <a:ln>
             <a:noFill/>
@@ -5647,7 +5647,7 @@
             <a:r>
               <a:rPr sz="1800" b="1" i="0">
                 <a:solidFill>
-                  <a:srgbClr val="9E2E4A"/>
+                  <a:srgbClr val="721D32"/>
                 </a:solidFill>
               </a:rPr>
               <a:t>약속 3</a:t>
@@ -5707,7 +5707,7 @@
     <p:bg>
       <p:bgPr>
         <a:solidFill>
-          <a:srgbClr val="D1617D"/>
+          <a:srgbClr val="DB3D65"/>
         </a:solidFill>
         <a:effectLst/>
       </p:bgPr>
@@ -5780,7 +5780,7 @@
             <a:r>
               <a:rPr sz="3000" b="1" i="0">
                 <a:solidFill>
-                  <a:srgbClr val="9E2E4A"/>
+                  <a:srgbClr val="721D32"/>
                 </a:solidFill>
               </a:rPr>
               <a:t>가족 사진</a:t>
@@ -5805,11 +5805,11 @@
             </a:avLst>
           </a:prstGeom>
           <a:solidFill>
-            <a:srgbClr val="F3CED7"/>
+            <a:srgbClr val="F7D4DD"/>
           </a:solidFill>
           <a:ln w="19050">
             <a:solidFill>
-              <a:srgbClr val="D1617D"/>
+              <a:srgbClr val="DB3D65"/>
             </a:solidFill>
             <a:prstDash val="dash"/>
           </a:ln>
@@ -5828,7 +5828,7 @@
             <a:r>
               <a:rPr sz="1200" b="0" i="0">
                 <a:solidFill>
-                  <a:srgbClr val="9E2E4A"/>
+                  <a:srgbClr val="721D32"/>
                 </a:solidFill>
               </a:rPr>
               <a:t>사진 1</a:t>
@@ -5853,11 +5853,11 @@
             </a:avLst>
           </a:prstGeom>
           <a:solidFill>
-            <a:srgbClr val="F3CED7"/>
+            <a:srgbClr val="F7D4DD"/>
           </a:solidFill>
           <a:ln w="19050">
             <a:solidFill>
-              <a:srgbClr val="D1617D"/>
+              <a:srgbClr val="DB3D65"/>
             </a:solidFill>
             <a:prstDash val="dash"/>
           </a:ln>
@@ -5876,7 +5876,7 @@
             <a:r>
               <a:rPr sz="1200" b="0" i="0">
                 <a:solidFill>
-                  <a:srgbClr val="9E2E4A"/>
+                  <a:srgbClr val="721D32"/>
                 </a:solidFill>
               </a:rPr>
               <a:t>사진 2</a:t>
@@ -5901,11 +5901,11 @@
             </a:avLst>
           </a:prstGeom>
           <a:solidFill>
-            <a:srgbClr val="F3CED7"/>
+            <a:srgbClr val="F7D4DD"/>
           </a:solidFill>
           <a:ln w="19050">
             <a:solidFill>
-              <a:srgbClr val="D1617D"/>
+              <a:srgbClr val="DB3D65"/>
             </a:solidFill>
             <a:prstDash val="dash"/>
           </a:ln>
@@ -5924,7 +5924,7 @@
             <a:r>
               <a:rPr sz="1200" b="0" i="0">
                 <a:solidFill>
-                  <a:srgbClr val="9E2E4A"/>
+                  <a:srgbClr val="721D32"/>
                 </a:solidFill>
               </a:rPr>
               <a:t>사진 3</a:t>
@@ -5949,11 +5949,11 @@
             </a:avLst>
           </a:prstGeom>
           <a:solidFill>
-            <a:srgbClr val="F3CED7"/>
+            <a:srgbClr val="F7D4DD"/>
           </a:solidFill>
           <a:ln w="19050">
             <a:solidFill>
-              <a:srgbClr val="D1617D"/>
+              <a:srgbClr val="DB3D65"/>
             </a:solidFill>
             <a:prstDash val="dash"/>
           </a:ln>
@@ -5972,7 +5972,7 @@
             <a:r>
               <a:rPr sz="1200" b="0" i="0">
                 <a:solidFill>
-                  <a:srgbClr val="9E2E4A"/>
+                  <a:srgbClr val="721D32"/>
                 </a:solidFill>
               </a:rPr>
               <a:t>사진 4</a:t>
@@ -5997,11 +5997,11 @@
             </a:avLst>
           </a:prstGeom>
           <a:solidFill>
-            <a:srgbClr val="F3CED7"/>
+            <a:srgbClr val="F7D4DD"/>
           </a:solidFill>
           <a:ln w="19050">
             <a:solidFill>
-              <a:srgbClr val="D1617D"/>
+              <a:srgbClr val="DB3D65"/>
             </a:solidFill>
             <a:prstDash val="dash"/>
           </a:ln>
@@ -6020,7 +6020,7 @@
             <a:r>
               <a:rPr sz="1200" b="0" i="0">
                 <a:solidFill>
-                  <a:srgbClr val="9E2E4A"/>
+                  <a:srgbClr val="721D32"/>
                 </a:solidFill>
               </a:rPr>
               <a:t>사진 5</a:t>
@@ -6045,11 +6045,11 @@
             </a:avLst>
           </a:prstGeom>
           <a:solidFill>
-            <a:srgbClr val="F3CED7"/>
+            <a:srgbClr val="F7D4DD"/>
           </a:solidFill>
           <a:ln w="19050">
             <a:solidFill>
-              <a:srgbClr val="D1617D"/>
+              <a:srgbClr val="DB3D65"/>
             </a:solidFill>
             <a:prstDash val="dash"/>
           </a:ln>
@@ -6068,7 +6068,7 @@
             <a:r>
               <a:rPr sz="1200" b="0" i="0">
                 <a:solidFill>
-                  <a:srgbClr val="9E2E4A"/>
+                  <a:srgbClr val="721D32"/>
                 </a:solidFill>
               </a:rPr>
               <a:t>사진 6</a:t>
@@ -6148,7 +6148,7 @@
             <a:r>
               <a:rPr sz="3600" b="1" i="0">
                 <a:solidFill>
-                  <a:srgbClr val="9E2E4A"/>
+                  <a:srgbClr val="721D32"/>
                 </a:solidFill>
               </a:rPr>
               <a:t>우리 가족 소개를 마칩니다</a:t>
@@ -6186,7 +6186,7 @@
             <a:r>
               <a:rPr sz="1700" b="0" i="1">
                 <a:solidFill>
-                  <a:srgbClr val="9E2E4A"/>
+                  <a:srgbClr val="721D32"/>
                 </a:solidFill>
               </a:rPr>
               <a:t>읽어 주셔서 고맙습니다</a:t>
@@ -6251,34 +6251,34 @@
         <a:sysClr val="window" lastClr="FFFFFF"/>
       </a:lt1>
       <a:dk2>
-        <a:srgbClr val="9E2E4A"/>
+        <a:srgbClr val="721D32"/>
       </a:dk2>
       <a:lt2>
-        <a:srgbClr val="FAEFF2"/>
+        <a:srgbClr val="FCF3F5"/>
       </a:lt2>
       <a:accent1>
-        <a:srgbClr val="D1617D"/>
+        <a:srgbClr val="DB3D65"/>
       </a:accent1>
       <a:accent2>
-        <a:srgbClr val="3B9151"/>
+        <a:srgbClr val="339941"/>
       </a:accent2>
       <a:accent3>
-        <a:srgbClr val="9E2E4A"/>
+        <a:srgbClr val="721D32"/>
       </a:accent3>
       <a:accent4>
-        <a:srgbClr val="F3CED7"/>
+        <a:srgbClr val="F7D4DD"/>
       </a:accent4>
       <a:accent5>
-        <a:srgbClr val="867967"/>
+        <a:srgbClr val="876B53"/>
       </a:accent5>
       <a:accent6>
-        <a:srgbClr val="C58292"/>
+        <a:srgbClr val="AA7784"/>
       </a:accent6>
       <a:hlink>
-        <a:srgbClr val="D1617D"/>
+        <a:srgbClr val="DB3D65"/>
       </a:hlink>
       <a:folHlink>
-        <a:srgbClr val="9E2E4A"/>
+        <a:srgbClr val="721D32"/>
       </a:folHlink>
     </a:clrScheme>
     <a:fontScheme name="Office">
